--- a/ssh-keys/figures/solution-overview-v01.pptx
+++ b/ssh-keys/figures/solution-overview-v01.pptx
@@ -259,7 +259,7 @@
           <a:p>
             <a:fld id="{9B14B292-788E-2748-9CD0-5BCF704EBB71}" type="datetimeFigureOut">
               <a:rPr lang="en-US" smtClean="0"/>
-              <a:t>6/4/26</a:t>
+              <a:t>6/5/26</a:t>
             </a:fld>
             <a:endParaRPr lang="en-US"/>
           </a:p>
@@ -457,7 +457,7 @@
           <a:p>
             <a:fld id="{9B14B292-788E-2748-9CD0-5BCF704EBB71}" type="datetimeFigureOut">
               <a:rPr lang="en-US" smtClean="0"/>
-              <a:t>6/4/26</a:t>
+              <a:t>6/5/26</a:t>
             </a:fld>
             <a:endParaRPr lang="en-US"/>
           </a:p>
@@ -665,7 +665,7 @@
           <a:p>
             <a:fld id="{9B14B292-788E-2748-9CD0-5BCF704EBB71}" type="datetimeFigureOut">
               <a:rPr lang="en-US" smtClean="0"/>
-              <a:t>6/4/26</a:t>
+              <a:t>6/5/26</a:t>
             </a:fld>
             <a:endParaRPr lang="en-US"/>
           </a:p>
@@ -863,7 +863,7 @@
           <a:p>
             <a:fld id="{9B14B292-788E-2748-9CD0-5BCF704EBB71}" type="datetimeFigureOut">
               <a:rPr lang="en-US" smtClean="0"/>
-              <a:t>6/4/26</a:t>
+              <a:t>6/5/26</a:t>
             </a:fld>
             <a:endParaRPr lang="en-US"/>
           </a:p>
@@ -1138,7 +1138,7 @@
           <a:p>
             <a:fld id="{9B14B292-788E-2748-9CD0-5BCF704EBB71}" type="datetimeFigureOut">
               <a:rPr lang="en-US" smtClean="0"/>
-              <a:t>6/4/26</a:t>
+              <a:t>6/5/26</a:t>
             </a:fld>
             <a:endParaRPr lang="en-US"/>
           </a:p>
@@ -1403,7 +1403,7 @@
           <a:p>
             <a:fld id="{9B14B292-788E-2748-9CD0-5BCF704EBB71}" type="datetimeFigureOut">
               <a:rPr lang="en-US" smtClean="0"/>
-              <a:t>6/4/26</a:t>
+              <a:t>6/5/26</a:t>
             </a:fld>
             <a:endParaRPr lang="en-US"/>
           </a:p>
@@ -1815,7 +1815,7 @@
           <a:p>
             <a:fld id="{9B14B292-788E-2748-9CD0-5BCF704EBB71}" type="datetimeFigureOut">
               <a:rPr lang="en-US" smtClean="0"/>
-              <a:t>6/4/26</a:t>
+              <a:t>6/5/26</a:t>
             </a:fld>
             <a:endParaRPr lang="en-US"/>
           </a:p>
@@ -1956,7 +1956,7 @@
           <a:p>
             <a:fld id="{9B14B292-788E-2748-9CD0-5BCF704EBB71}" type="datetimeFigureOut">
               <a:rPr lang="en-US" smtClean="0"/>
-              <a:t>6/4/26</a:t>
+              <a:t>6/5/26</a:t>
             </a:fld>
             <a:endParaRPr lang="en-US"/>
           </a:p>
@@ -2069,7 +2069,7 @@
           <a:p>
             <a:fld id="{9B14B292-788E-2748-9CD0-5BCF704EBB71}" type="datetimeFigureOut">
               <a:rPr lang="en-US" smtClean="0"/>
-              <a:t>6/4/26</a:t>
+              <a:t>6/5/26</a:t>
             </a:fld>
             <a:endParaRPr lang="en-US"/>
           </a:p>
@@ -2380,7 +2380,7 @@
           <a:p>
             <a:fld id="{9B14B292-788E-2748-9CD0-5BCF704EBB71}" type="datetimeFigureOut">
               <a:rPr lang="en-US" smtClean="0"/>
-              <a:t>6/4/26</a:t>
+              <a:t>6/5/26</a:t>
             </a:fld>
             <a:endParaRPr lang="en-US"/>
           </a:p>
@@ -2668,7 +2668,7 @@
           <a:p>
             <a:fld id="{9B14B292-788E-2748-9CD0-5BCF704EBB71}" type="datetimeFigureOut">
               <a:rPr lang="en-US" smtClean="0"/>
-              <a:t>6/4/26</a:t>
+              <a:t>6/5/26</a:t>
             </a:fld>
             <a:endParaRPr lang="en-US"/>
           </a:p>
@@ -2909,7 +2909,7 @@
           <a:p>
             <a:fld id="{9B14B292-788E-2748-9CD0-5BCF704EBB71}" type="datetimeFigureOut">
               <a:rPr lang="en-US" smtClean="0"/>
-              <a:t>6/4/26</a:t>
+              <a:t>6/5/26</a:t>
             </a:fld>
             <a:endParaRPr lang="en-US"/>
           </a:p>
@@ -3340,8 +3340,8 @@
         </p:nvSpPr>
         <p:spPr>
           <a:xfrm>
-            <a:off x="6668767" y="1763486"/>
-            <a:ext cx="4510861" cy="2438400"/>
+            <a:off x="6668767" y="859970"/>
+            <a:ext cx="4510861" cy="2253734"/>
           </a:xfrm>
           <a:prstGeom prst="rect">
             <a:avLst/>
@@ -3396,7 +3396,7 @@
         </p:nvSpPr>
         <p:spPr>
           <a:xfrm>
-            <a:off x="7766806" y="1394154"/>
+            <a:off x="7766806" y="398297"/>
             <a:ext cx="2425857" cy="369332"/>
           </a:xfrm>
           <a:prstGeom prst="rect">
@@ -3411,7 +3411,11 @@
           <a:lstStyle/>
           <a:p>
             <a:r>
-              <a:rPr lang="en-US" dirty="0"/>
+              <a:rPr lang="en-US" dirty="0">
+                <a:solidFill>
+                  <a:srgbClr val="0432FF"/>
+                </a:solidFill>
+              </a:rPr>
               <a:t>login node and storage</a:t>
             </a:r>
           </a:p>
@@ -3431,8 +3435,8 @@
         </p:nvSpPr>
         <p:spPr>
           <a:xfrm>
-            <a:off x="1235157" y="1763486"/>
-            <a:ext cx="3214342" cy="2253734"/>
+            <a:off x="929286" y="859970"/>
+            <a:ext cx="3520214" cy="2253734"/>
           </a:xfrm>
           <a:prstGeom prst="rect">
             <a:avLst/>
@@ -3487,7 +3491,7 @@
         </p:nvSpPr>
         <p:spPr>
           <a:xfrm>
-            <a:off x="2434672" y="1209472"/>
+            <a:off x="2434672" y="398297"/>
             <a:ext cx="827919" cy="369332"/>
           </a:xfrm>
           <a:prstGeom prst="rect">
@@ -3502,7 +3506,11 @@
           <a:lstStyle/>
           <a:p>
             <a:r>
-              <a:rPr lang="en-US" dirty="0"/>
+              <a:rPr lang="en-US" dirty="0">
+                <a:solidFill>
+                  <a:srgbClr val="0432FF"/>
+                </a:solidFill>
+              </a:rPr>
               <a:t>laptop</a:t>
             </a:r>
           </a:p>
@@ -3522,7 +3530,7 @@
         </p:nvSpPr>
         <p:spPr>
           <a:xfrm>
-            <a:off x="7668949" y="1829190"/>
+            <a:off x="7668949" y="925674"/>
             <a:ext cx="2510495" cy="369332"/>
           </a:xfrm>
           <a:prstGeom prst="rect">
@@ -3565,7 +3573,7 @@
         </p:nvSpPr>
         <p:spPr>
           <a:xfrm>
-            <a:off x="1705574" y="1875357"/>
+            <a:off x="1651144" y="971841"/>
             <a:ext cx="2273508" cy="646331"/>
           </a:xfrm>
           <a:prstGeom prst="rect">
@@ -3579,6 +3587,7 @@
           </a:bodyPr>
           <a:lstStyle/>
           <a:p>
+            <a:pPr algn="ctr"/>
             <a:r>
               <a:rPr lang="en-US" dirty="0"/>
               <a:t>/Users/</a:t>
@@ -3593,16 +3602,17 @@
             </a:r>
           </a:p>
           <a:p>
+            <a:pPr algn="ctr"/>
             <a:endParaRPr lang="en-US" dirty="0"/>
           </a:p>
         </p:txBody>
       </p:sp>
       <p:sp>
         <p:nvSpPr>
-          <p:cNvPr id="20" name="TextBox 19">
-            <a:extLst>
-              <a:ext uri="{FF2B5EF4-FFF2-40B4-BE49-F238E27FC236}">
-                <a16:creationId xmlns:a16="http://schemas.microsoft.com/office/drawing/2014/main" id="{BAF16CC9-8547-D4D8-BFD6-5303C9B1A4FB}"/>
+          <p:cNvPr id="2" name="TextBox 1">
+            <a:extLst>
+              <a:ext uri="{FF2B5EF4-FFF2-40B4-BE49-F238E27FC236}">
+                <a16:creationId xmlns:a16="http://schemas.microsoft.com/office/drawing/2014/main" id="{09EB3941-283C-991E-DEFF-D993566F7EE2}"/>
               </a:ext>
             </a:extLst>
           </p:cNvPr>
@@ -3611,8 +3621,8 @@
         </p:nvSpPr>
         <p:spPr>
           <a:xfrm>
-            <a:off x="2241465" y="3429000"/>
-            <a:ext cx="795411" cy="369332"/>
+            <a:off x="968823" y="1328052"/>
+            <a:ext cx="3458383" cy="646331"/>
           </a:xfrm>
           <a:prstGeom prst="rect">
             <a:avLst/>
@@ -3625,9 +3635,591 @@
           </a:bodyPr>
           <a:lstStyle/>
           <a:p>
+            <a:pPr algn="ctr"/>
+            <a:r>
+              <a:rPr lang="en-US" i="1" dirty="0"/>
+              <a:t>generate</a:t>
+            </a:r>
+          </a:p>
+          <a:p>
+            <a:pPr algn="ctr"/>
             <a:r>
               <a:rPr lang="en-US" dirty="0"/>
-              <a:t>config</a:t>
+              <a:t>key pair = (public key, private key)</a:t>
+            </a:r>
+          </a:p>
+        </p:txBody>
+      </p:sp>
+      <p:sp>
+        <p:nvSpPr>
+          <p:cNvPr id="3" name="TextBox 2">
+            <a:extLst>
+              <a:ext uri="{FF2B5EF4-FFF2-40B4-BE49-F238E27FC236}">
+                <a16:creationId xmlns:a16="http://schemas.microsoft.com/office/drawing/2014/main" id="{F33617EC-EC5C-DDF1-0968-A4A3B838A1CA}"/>
+              </a:ext>
+            </a:extLst>
+          </p:cNvPr>
+          <p:cNvSpPr txBox="1"/>
+          <p:nvPr/>
+        </p:nvSpPr>
+        <p:spPr>
+          <a:xfrm>
+            <a:off x="7036171" y="1525172"/>
+            <a:ext cx="1187184" cy="369332"/>
+          </a:xfrm>
+          <a:prstGeom prst="rect">
+            <a:avLst/>
+          </a:prstGeom>
+          <a:noFill/>
+        </p:spPr>
+        <p:txBody>
+          <a:bodyPr wrap="none" rtlCol="0">
+            <a:spAutoFit/>
+          </a:bodyPr>
+          <a:lstStyle/>
+          <a:p>
+            <a:r>
+              <a:rPr lang="en-US" dirty="0"/>
+              <a:t>public key</a:t>
+            </a:r>
+          </a:p>
+        </p:txBody>
+      </p:sp>
+      <p:sp>
+        <p:nvSpPr>
+          <p:cNvPr id="5" name="TextBox 4">
+            <a:extLst>
+              <a:ext uri="{FF2B5EF4-FFF2-40B4-BE49-F238E27FC236}">
+                <a16:creationId xmlns:a16="http://schemas.microsoft.com/office/drawing/2014/main" id="{BBA9AC24-C322-F7BC-CF36-A0EA03BFD0C3}"/>
+              </a:ext>
+            </a:extLst>
+          </p:cNvPr>
+          <p:cNvSpPr txBox="1"/>
+          <p:nvPr/>
+        </p:nvSpPr>
+        <p:spPr>
+          <a:xfrm>
+            <a:off x="2107571" y="2738726"/>
+            <a:ext cx="1172052" cy="369332"/>
+          </a:xfrm>
+          <a:prstGeom prst="rect">
+            <a:avLst/>
+          </a:prstGeom>
+          <a:noFill/>
+        </p:spPr>
+        <p:txBody>
+          <a:bodyPr wrap="none" rtlCol="0">
+            <a:spAutoFit/>
+          </a:bodyPr>
+          <a:lstStyle/>
+          <a:p>
+            <a:pPr algn="ctr"/>
+            <a:r>
+              <a:rPr lang="en-US" dirty="0"/>
+              <a:t>ssh-agent</a:t>
+            </a:r>
+          </a:p>
+        </p:txBody>
+      </p:sp>
+      <p:sp>
+        <p:nvSpPr>
+          <p:cNvPr id="6" name="TextBox 5">
+            <a:extLst>
+              <a:ext uri="{FF2B5EF4-FFF2-40B4-BE49-F238E27FC236}">
+                <a16:creationId xmlns:a16="http://schemas.microsoft.com/office/drawing/2014/main" id="{08455195-B059-ACF0-677D-9B78CB969084}"/>
+              </a:ext>
+            </a:extLst>
+          </p:cNvPr>
+          <p:cNvSpPr txBox="1"/>
+          <p:nvPr/>
+        </p:nvSpPr>
+        <p:spPr>
+          <a:xfrm rot="16200000">
+            <a:off x="182884" y="1716570"/>
+            <a:ext cx="782587" cy="369332"/>
+          </a:xfrm>
+          <a:prstGeom prst="rect">
+            <a:avLst/>
+          </a:prstGeom>
+          <a:noFill/>
+        </p:spPr>
+        <p:txBody>
+          <a:bodyPr wrap="none" rtlCol="0">
+            <a:spAutoFit/>
+          </a:bodyPr>
+          <a:lstStyle/>
+          <a:p>
+            <a:r>
+              <a:rPr lang="en-US" b="1" dirty="0">
+                <a:solidFill>
+                  <a:srgbClr val="7030A0"/>
+                </a:solidFill>
+              </a:rPr>
+              <a:t>setup</a:t>
+            </a:r>
+          </a:p>
+        </p:txBody>
+      </p:sp>
+      <p:sp>
+        <p:nvSpPr>
+          <p:cNvPr id="7" name="Rectangle 6">
+            <a:extLst>
+              <a:ext uri="{FF2B5EF4-FFF2-40B4-BE49-F238E27FC236}">
+                <a16:creationId xmlns:a16="http://schemas.microsoft.com/office/drawing/2014/main" id="{200C2AD6-A209-CDB0-3980-7431CA2AC3A8}"/>
+              </a:ext>
+            </a:extLst>
+          </p:cNvPr>
+          <p:cNvSpPr/>
+          <p:nvPr/>
+        </p:nvSpPr>
+        <p:spPr>
+          <a:xfrm>
+            <a:off x="6668768" y="3701140"/>
+            <a:ext cx="4510861" cy="2253734"/>
+          </a:xfrm>
+          <a:prstGeom prst="rect">
+            <a:avLst/>
+          </a:prstGeom>
+          <a:noFill/>
+          <a:ln w="28575">
+            <a:solidFill>
+              <a:schemeClr val="tx1"/>
+            </a:solidFill>
+          </a:ln>
+        </p:spPr>
+        <p:style>
+          <a:lnRef idx="2">
+            <a:schemeClr val="accent1">
+              <a:shade val="15000"/>
+            </a:schemeClr>
+          </a:lnRef>
+          <a:fillRef idx="1">
+            <a:schemeClr val="accent1"/>
+          </a:fillRef>
+          <a:effectRef idx="0">
+            <a:schemeClr val="accent1"/>
+          </a:effectRef>
+          <a:fontRef idx="minor">
+            <a:schemeClr val="lt1"/>
+          </a:fontRef>
+        </p:style>
+        <p:txBody>
+          <a:bodyPr rtlCol="0" anchor="ctr"/>
+          <a:lstStyle/>
+          <a:p>
+            <a:pPr algn="ctr"/>
+            <a:endParaRPr lang="en-US" dirty="0">
+              <a:solidFill>
+                <a:schemeClr val="tx1"/>
+              </a:solidFill>
+            </a:endParaRPr>
+          </a:p>
+        </p:txBody>
+      </p:sp>
+      <p:sp>
+        <p:nvSpPr>
+          <p:cNvPr id="8" name="Rectangle 7">
+            <a:extLst>
+              <a:ext uri="{FF2B5EF4-FFF2-40B4-BE49-F238E27FC236}">
+                <a16:creationId xmlns:a16="http://schemas.microsoft.com/office/drawing/2014/main" id="{4223C518-AE17-59AC-01E3-97496FAD3D89}"/>
+              </a:ext>
+            </a:extLst>
+          </p:cNvPr>
+          <p:cNvSpPr/>
+          <p:nvPr/>
+        </p:nvSpPr>
+        <p:spPr>
+          <a:xfrm>
+            <a:off x="962967" y="3701140"/>
+            <a:ext cx="3486534" cy="2253734"/>
+          </a:xfrm>
+          <a:prstGeom prst="rect">
+            <a:avLst/>
+          </a:prstGeom>
+          <a:noFill/>
+          <a:ln w="28575">
+            <a:solidFill>
+              <a:schemeClr val="tx1"/>
+            </a:solidFill>
+          </a:ln>
+        </p:spPr>
+        <p:style>
+          <a:lnRef idx="2">
+            <a:schemeClr val="accent1">
+              <a:shade val="15000"/>
+            </a:schemeClr>
+          </a:lnRef>
+          <a:fillRef idx="1">
+            <a:schemeClr val="accent1"/>
+          </a:fillRef>
+          <a:effectRef idx="0">
+            <a:schemeClr val="accent1"/>
+          </a:effectRef>
+          <a:fontRef idx="minor">
+            <a:schemeClr val="lt1"/>
+          </a:fontRef>
+        </p:style>
+        <p:txBody>
+          <a:bodyPr rtlCol="0" anchor="ctr"/>
+          <a:lstStyle/>
+          <a:p>
+            <a:pPr algn="ctr"/>
+            <a:endParaRPr lang="en-US" dirty="0">
+              <a:solidFill>
+                <a:schemeClr val="tx1"/>
+              </a:solidFill>
+            </a:endParaRPr>
+          </a:p>
+        </p:txBody>
+      </p:sp>
+      <p:sp>
+        <p:nvSpPr>
+          <p:cNvPr id="14" name="TextBox 13">
+            <a:extLst>
+              <a:ext uri="{FF2B5EF4-FFF2-40B4-BE49-F238E27FC236}">
+                <a16:creationId xmlns:a16="http://schemas.microsoft.com/office/drawing/2014/main" id="{92D7FEF1-B375-F925-CE81-D52432AB82B0}"/>
+              </a:ext>
+            </a:extLst>
+          </p:cNvPr>
+          <p:cNvSpPr txBox="1"/>
+          <p:nvPr/>
+        </p:nvSpPr>
+        <p:spPr>
+          <a:xfrm>
+            <a:off x="1388145" y="3655168"/>
+            <a:ext cx="2704883" cy="2308324"/>
+          </a:xfrm>
+          <a:prstGeom prst="rect">
+            <a:avLst/>
+          </a:prstGeom>
+          <a:noFill/>
+        </p:spPr>
+        <p:txBody>
+          <a:bodyPr wrap="square" rtlCol="0">
+            <a:spAutoFit/>
+          </a:bodyPr>
+          <a:lstStyle/>
+          <a:p>
+            <a:pPr marL="342900" indent="-342900">
+              <a:buAutoNum type="arabicPeriod"/>
+            </a:pPr>
+            <a:r>
+              <a:rPr lang="en-US" dirty="0"/>
+              <a:t>Issue ssh command</a:t>
+            </a:r>
+          </a:p>
+          <a:p>
+            <a:pPr marL="342900" indent="-342900">
+              <a:buAutoNum type="arabicPeriod"/>
+            </a:pPr>
+            <a:endParaRPr lang="en-US" dirty="0"/>
+          </a:p>
+          <a:p>
+            <a:pPr marL="342900" indent="-342900">
+              <a:buAutoNum type="arabicPeriod"/>
+            </a:pPr>
+            <a:endParaRPr lang="en-US" dirty="0"/>
+          </a:p>
+          <a:p>
+            <a:pPr marL="342900" indent="-342900">
+              <a:buAutoNum type="arabicPeriod"/>
+            </a:pPr>
+            <a:endParaRPr lang="en-US" dirty="0"/>
+          </a:p>
+          <a:p>
+            <a:pPr marL="342900" indent="-342900">
+              <a:buAutoNum type="arabicPeriod"/>
+            </a:pPr>
+            <a:endParaRPr lang="en-US" dirty="0"/>
+          </a:p>
+          <a:p>
+            <a:r>
+              <a:rPr lang="en-US" dirty="0"/>
+              <a:t>6. ssh command completes; user is logged in.</a:t>
+            </a:r>
+          </a:p>
+        </p:txBody>
+      </p:sp>
+      <p:sp>
+        <p:nvSpPr>
+          <p:cNvPr id="17" name="TextBox 16">
+            <a:extLst>
+              <a:ext uri="{FF2B5EF4-FFF2-40B4-BE49-F238E27FC236}">
+                <a16:creationId xmlns:a16="http://schemas.microsoft.com/office/drawing/2014/main" id="{9E056052-AE67-8417-28C0-6F5C00BBAF3A}"/>
+              </a:ext>
+            </a:extLst>
+          </p:cNvPr>
+          <p:cNvSpPr txBox="1"/>
+          <p:nvPr/>
+        </p:nvSpPr>
+        <p:spPr>
+          <a:xfrm>
+            <a:off x="6872886" y="3974460"/>
+            <a:ext cx="4012828" cy="1477328"/>
+          </a:xfrm>
+          <a:prstGeom prst="rect">
+            <a:avLst/>
+          </a:prstGeom>
+          <a:noFill/>
+        </p:spPr>
+        <p:txBody>
+          <a:bodyPr wrap="square" rtlCol="0">
+            <a:spAutoFit/>
+          </a:bodyPr>
+          <a:lstStyle/>
+          <a:p>
+            <a:r>
+              <a:rPr lang="en-US" dirty="0"/>
+              <a:t>2. ssh request received; public key inspected.</a:t>
+            </a:r>
+          </a:p>
+          <a:p>
+            <a:r>
+              <a:rPr lang="en-US" dirty="0"/>
+              <a:t>3. Match the public key on the laptop.</a:t>
+            </a:r>
+          </a:p>
+          <a:p>
+            <a:r>
+              <a:rPr lang="en-US" dirty="0"/>
+              <a:t>4. Examine the private key</a:t>
+            </a:r>
+          </a:p>
+          <a:p>
+            <a:r>
+              <a:rPr lang="en-US" dirty="0"/>
+              <a:t>5. If this checks, permit the connection</a:t>
+            </a:r>
+          </a:p>
+        </p:txBody>
+      </p:sp>
+      <p:sp>
+        <p:nvSpPr>
+          <p:cNvPr id="19" name="TextBox 18">
+            <a:extLst>
+              <a:ext uri="{FF2B5EF4-FFF2-40B4-BE49-F238E27FC236}">
+                <a16:creationId xmlns:a16="http://schemas.microsoft.com/office/drawing/2014/main" id="{608EDC07-3AC7-DC21-FBAB-231C9148F4DC}"/>
+              </a:ext>
+            </a:extLst>
+          </p:cNvPr>
+          <p:cNvSpPr txBox="1"/>
+          <p:nvPr/>
+        </p:nvSpPr>
+        <p:spPr>
+          <a:xfrm rot="16200000">
+            <a:off x="-220587" y="4557740"/>
+            <a:ext cx="1589538" cy="369332"/>
+          </a:xfrm>
+          <a:prstGeom prst="rect">
+            <a:avLst/>
+          </a:prstGeom>
+          <a:noFill/>
+        </p:spPr>
+        <p:txBody>
+          <a:bodyPr wrap="none" rtlCol="0">
+            <a:spAutoFit/>
+          </a:bodyPr>
+          <a:lstStyle/>
+          <a:p>
+            <a:r>
+              <a:rPr lang="en-US" b="1" dirty="0">
+                <a:solidFill>
+                  <a:srgbClr val="7030A0"/>
+                </a:solidFill>
+              </a:rPr>
+              <a:t>login process</a:t>
+            </a:r>
+          </a:p>
+        </p:txBody>
+      </p:sp>
+      <p:cxnSp>
+        <p:nvCxnSpPr>
+          <p:cNvPr id="23" name="Straight Arrow Connector 22">
+            <a:extLst>
+              <a:ext uri="{FF2B5EF4-FFF2-40B4-BE49-F238E27FC236}">
+                <a16:creationId xmlns:a16="http://schemas.microsoft.com/office/drawing/2014/main" id="{4CFFC5AF-35D5-9622-1FC0-C4CCFCF3899B}"/>
+              </a:ext>
+            </a:extLst>
+          </p:cNvPr>
+          <p:cNvCxnSpPr/>
+          <p:nvPr/>
+        </p:nvCxnSpPr>
+        <p:spPr>
+          <a:xfrm>
+            <a:off x="4449499" y="4038600"/>
+            <a:ext cx="2219268" cy="0"/>
+          </a:xfrm>
+          <a:prstGeom prst="straightConnector1">
+            <a:avLst/>
+          </a:prstGeom>
+          <a:ln w="28575">
+            <a:solidFill>
+              <a:schemeClr val="tx1"/>
+            </a:solidFill>
+            <a:headEnd type="none" w="med" len="med"/>
+            <a:tailEnd type="arrow" w="med" len="med"/>
+          </a:ln>
+        </p:spPr>
+        <p:style>
+          <a:lnRef idx="2">
+            <a:schemeClr val="accent1"/>
+          </a:lnRef>
+          <a:fillRef idx="0">
+            <a:schemeClr val="accent1"/>
+          </a:fillRef>
+          <a:effectRef idx="1">
+            <a:schemeClr val="accent1"/>
+          </a:effectRef>
+          <a:fontRef idx="minor">
+            <a:schemeClr val="tx1"/>
+          </a:fontRef>
+        </p:style>
+      </p:cxnSp>
+      <p:cxnSp>
+        <p:nvCxnSpPr>
+          <p:cNvPr id="24" name="Straight Arrow Connector 23">
+            <a:extLst>
+              <a:ext uri="{FF2B5EF4-FFF2-40B4-BE49-F238E27FC236}">
+                <a16:creationId xmlns:a16="http://schemas.microsoft.com/office/drawing/2014/main" id="{AED0C364-A8A7-AE36-1924-789ABBAC47E5}"/>
+              </a:ext>
+            </a:extLst>
+          </p:cNvPr>
+          <p:cNvCxnSpPr/>
+          <p:nvPr/>
+        </p:nvCxnSpPr>
+        <p:spPr>
+          <a:xfrm>
+            <a:off x="4449499" y="5440902"/>
+            <a:ext cx="2219268" cy="0"/>
+          </a:xfrm>
+          <a:prstGeom prst="straightConnector1">
+            <a:avLst/>
+          </a:prstGeom>
+          <a:ln w="28575">
+            <a:solidFill>
+              <a:schemeClr val="tx1"/>
+            </a:solidFill>
+            <a:headEnd type="arrow" w="med" len="med"/>
+            <a:tailEnd type="none" w="med" len="med"/>
+          </a:ln>
+        </p:spPr>
+        <p:style>
+          <a:lnRef idx="2">
+            <a:schemeClr val="accent1"/>
+          </a:lnRef>
+          <a:fillRef idx="0">
+            <a:schemeClr val="accent1"/>
+          </a:fillRef>
+          <a:effectRef idx="1">
+            <a:schemeClr val="accent1"/>
+          </a:effectRef>
+          <a:fontRef idx="minor">
+            <a:schemeClr val="tx1"/>
+          </a:fontRef>
+        </p:style>
+      </p:cxnSp>
+      <p:sp>
+        <p:nvSpPr>
+          <p:cNvPr id="25" name="TextBox 24">
+            <a:extLst>
+              <a:ext uri="{FF2B5EF4-FFF2-40B4-BE49-F238E27FC236}">
+                <a16:creationId xmlns:a16="http://schemas.microsoft.com/office/drawing/2014/main" id="{43FF110F-42AA-BC63-2F68-C7598F9032E8}"/>
+              </a:ext>
+            </a:extLst>
+          </p:cNvPr>
+          <p:cNvSpPr txBox="1"/>
+          <p:nvPr/>
+        </p:nvSpPr>
+        <p:spPr>
+          <a:xfrm>
+            <a:off x="874855" y="2020355"/>
+            <a:ext cx="3646318" cy="369332"/>
+          </a:xfrm>
+          <a:prstGeom prst="rect">
+            <a:avLst/>
+          </a:prstGeom>
+          <a:noFill/>
+        </p:spPr>
+        <p:txBody>
+          <a:bodyPr wrap="none" rtlCol="0">
+            <a:spAutoFit/>
+          </a:bodyPr>
+          <a:lstStyle/>
+          <a:p>
+            <a:pPr algn="ctr"/>
+            <a:r>
+              <a:rPr lang="en-US" i="1" dirty="0"/>
+              <a:t>Manually copy public key to cluster</a:t>
+            </a:r>
+          </a:p>
+        </p:txBody>
+      </p:sp>
+      <p:sp>
+        <p:nvSpPr>
+          <p:cNvPr id="26" name="TextBox 25">
+            <a:extLst>
+              <a:ext uri="{FF2B5EF4-FFF2-40B4-BE49-F238E27FC236}">
+                <a16:creationId xmlns:a16="http://schemas.microsoft.com/office/drawing/2014/main" id="{816E67A0-C382-C0B4-CDFA-96CC2174252C}"/>
+              </a:ext>
+            </a:extLst>
+          </p:cNvPr>
+          <p:cNvSpPr txBox="1"/>
+          <p:nvPr/>
+        </p:nvSpPr>
+        <p:spPr>
+          <a:xfrm>
+            <a:off x="5111703" y="3701140"/>
+            <a:ext cx="894860" cy="369332"/>
+          </a:xfrm>
+          <a:prstGeom prst="rect">
+            <a:avLst/>
+          </a:prstGeom>
+          <a:noFill/>
+        </p:spPr>
+        <p:txBody>
+          <a:bodyPr wrap="none" rtlCol="0">
+            <a:spAutoFit/>
+          </a:bodyPr>
+          <a:lstStyle/>
+          <a:p>
+            <a:r>
+              <a:rPr lang="en-US" dirty="0"/>
+              <a:t>control</a:t>
+            </a:r>
+          </a:p>
+        </p:txBody>
+      </p:sp>
+      <p:sp>
+        <p:nvSpPr>
+          <p:cNvPr id="27" name="TextBox 26">
+            <a:extLst>
+              <a:ext uri="{FF2B5EF4-FFF2-40B4-BE49-F238E27FC236}">
+                <a16:creationId xmlns:a16="http://schemas.microsoft.com/office/drawing/2014/main" id="{6FC5AD85-A740-5440-28B0-18DB297168BD}"/>
+              </a:ext>
+            </a:extLst>
+          </p:cNvPr>
+          <p:cNvSpPr txBox="1"/>
+          <p:nvPr/>
+        </p:nvSpPr>
+        <p:spPr>
+          <a:xfrm>
+            <a:off x="5075803" y="5082456"/>
+            <a:ext cx="894860" cy="369332"/>
+          </a:xfrm>
+          <a:prstGeom prst="rect">
+            <a:avLst/>
+          </a:prstGeom>
+          <a:noFill/>
+        </p:spPr>
+        <p:txBody>
+          <a:bodyPr wrap="none" rtlCol="0">
+            <a:spAutoFit/>
+          </a:bodyPr>
+          <a:lstStyle/>
+          <a:p>
+            <a:r>
+              <a:rPr lang="en-US" dirty="0"/>
+              <a:t>control</a:t>
             </a:r>
           </a:p>
         </p:txBody>
